--- a/content/W02/D3/slides/C2_W02_D03_half1_STUDENT.pptx
+++ b/content/W02/D3/slides/C2_W02_D03_half1_STUDENT.pptx
@@ -13157,7 +13157,7 @@
       </p:sp>
       <p:pic>
         <p:nvPicPr>
-          <p:cNvPr id="9" name="mermaid diagram" descr="4a507617d3782b84.png"/>
+          <p:cNvPr id="9" name="mermaid diagram" descr="818e5812c42e9826.png"/>
           <p:cNvPicPr>
             <a:picLocks noChangeAspect="1"/>
           </p:cNvPicPr>
@@ -13964,7 +13964,7 @@
       </p:sp>
       <p:pic>
         <p:nvPicPr>
-          <p:cNvPr id="9" name="mermaid diagram" descr="dfb7f7dcd79bc1ba.png"/>
+          <p:cNvPr id="9" name="mermaid diagram" descr="7ef44a2d0006e263.png"/>
           <p:cNvPicPr>
             <a:picLocks noChangeAspect="1"/>
           </p:cNvPicPr>
@@ -15042,7 +15042,7 @@
       </p:sp>
       <p:pic>
         <p:nvPicPr>
-          <p:cNvPr id="14" name="mermaid diagram" descr="65fd2146f95aaad4.png"/>
+          <p:cNvPr id="14" name="mermaid diagram" descr="06c99e96ab73fe5d.png"/>
           <p:cNvPicPr>
             <a:picLocks noChangeAspect="1"/>
           </p:cNvPicPr>
@@ -15057,7 +15057,7 @@
         <p:spPr>
           <a:xfrm>
             <a:off x="530352" y="2831084"/>
-            <a:ext cx="11130991" cy="1121617"/>
+            <a:ext cx="11130991" cy="1129748"/>
           </a:xfrm>
           <a:prstGeom prst="rect">
             <a:avLst/>
@@ -22452,7 +22452,7 @@
       </p:sp>
       <p:pic>
         <p:nvPicPr>
-          <p:cNvPr id="9" name="mermaid diagram" descr="65c39f22671186db.png"/>
+          <p:cNvPr id="9" name="mermaid diagram" descr="069742a8089cc0d4.png"/>
           <p:cNvPicPr>
             <a:picLocks noChangeAspect="1"/>
           </p:cNvPicPr>
@@ -27597,7 +27597,7 @@
       </p:sp>
       <p:pic>
         <p:nvPicPr>
-          <p:cNvPr id="9" name="mermaid diagram" descr="09a61d9d9a71cf66.png"/>
+          <p:cNvPr id="9" name="mermaid diagram" descr="83b5168f5f4a30a2.png"/>
           <p:cNvPicPr>
             <a:picLocks noChangeAspect="1"/>
           </p:cNvPicPr>
@@ -28350,7 +28350,7 @@
       </p:sp>
       <p:pic>
         <p:nvPicPr>
-          <p:cNvPr id="9" name="mermaid diagram" descr="04ddf3cde7972034.png"/>
+          <p:cNvPr id="9" name="mermaid diagram" descr="f187dfcac7c5c453.png"/>
           <p:cNvPicPr>
             <a:picLocks noChangeAspect="1"/>
           </p:cNvPicPr>
@@ -35863,7 +35863,7 @@
       </p:sp>
       <p:pic>
         <p:nvPicPr>
-          <p:cNvPr id="9" name="mermaid diagram" descr="1519f272a037a520.png"/>
+          <p:cNvPr id="9" name="mermaid diagram" descr="eb7fd92cbec98375.png"/>
           <p:cNvPicPr>
             <a:picLocks noChangeAspect="1"/>
           </p:cNvPicPr>
@@ -40026,7 +40026,7 @@
       </p:sp>
       <p:pic>
         <p:nvPicPr>
-          <p:cNvPr id="9" name="mermaid diagram" descr="efd071a1195badef.png"/>
+          <p:cNvPr id="9" name="mermaid diagram" descr="a260f1bd8b0a8f14.png"/>
           <p:cNvPicPr>
             <a:picLocks noChangeAspect="1"/>
           </p:cNvPicPr>
@@ -40833,7 +40833,7 @@
       </p:sp>
       <p:pic>
         <p:nvPicPr>
-          <p:cNvPr id="9" name="mermaid diagram" descr="ccd9dc72bf2e93c1.png"/>
+          <p:cNvPr id="9" name="mermaid diagram" descr="be6527f2103f3f17.png"/>
           <p:cNvPicPr>
             <a:picLocks noChangeAspect="1"/>
           </p:cNvPicPr>
@@ -44384,7 +44384,7 @@
       </p:sp>
       <p:pic>
         <p:nvPicPr>
-          <p:cNvPr id="10" name="mermaid diagram" descr="0f2dd2aeb89fba87.png"/>
+          <p:cNvPr id="10" name="mermaid diagram" descr="85555365be3c0ceb.png"/>
           <p:cNvPicPr>
             <a:picLocks noChangeAspect="1"/>
           </p:cNvPicPr>
@@ -52005,7 +52005,7 @@
       </p:sp>
       <p:pic>
         <p:nvPicPr>
-          <p:cNvPr id="9" name="mermaid diagram" descr="43249a5ad3541adb.png"/>
+          <p:cNvPr id="9" name="mermaid diagram" descr="2148a1327f2349c8.png"/>
           <p:cNvPicPr>
             <a:picLocks noChangeAspect="1"/>
           </p:cNvPicPr>
@@ -56314,7 +56314,7 @@
       </p:sp>
       <p:pic>
         <p:nvPicPr>
-          <p:cNvPr id="9" name="mermaid diagram" descr="baf6bf1b461432b2.png"/>
+          <p:cNvPr id="9" name="mermaid diagram" descr="a2e9a95e8ae96427.png"/>
           <p:cNvPicPr>
             <a:picLocks noChangeAspect="1"/>
           </p:cNvPicPr>

--- a/content/W02/D3/slides/C2_W02_D03_half1_STUDENT.pptx
+++ b/content/W02/D3/slides/C2_W02_D03_half1_STUDENT.pptx
@@ -20228,7 +20228,7 @@
                 </a:solidFill>
                 <a:latin typeface="Calibri"/>
               </a:rPr>
-              <a:t>Week 2 Wednesday: the protect list</a:t>
+              <a:t>Week 2, Day 3. The protect list, ranked the way it was asked</a:t>
             </a:r>
           </a:p>
         </p:txBody>
@@ -20794,7 +20794,7 @@
                 </a:solidFill>
                 <a:latin typeface="Calibri"/>
               </a:rPr>
-              <a:t>Week 2 Wednesday: the protect list</a:t>
+              <a:t>Week 2, Day 3. The protect list, ranked the way it was asked</a:t>
             </a:r>
           </a:p>
         </p:txBody>
@@ -34331,7 +34331,7 @@
                 </a:solidFill>
                 <a:latin typeface="Calibri"/>
               </a:rPr>
-              <a:t>Week 2 Wednesday: the protect list</a:t>
+              <a:t>Week 2, Day 3. The protect list, ranked the way it was asked</a:t>
             </a:r>
           </a:p>
         </p:txBody>
@@ -46583,7 +46583,7 @@
         </p:nvGraphicFramePr>
         <p:xfrm>
           <a:off x="530352" y="1956816"/>
-          <a:ext cx="11130989" cy="1676400"/>
+          <a:ext cx="11130990" cy="2011680"/>
         </p:xfrm>
         <a:graphic>
           <a:graphicData uri="http://schemas.openxmlformats.org/drawingml/2006/table">
@@ -46592,10 +46592,10 @@
                 <a:tableStyleId>{2D5ABB26-0587-4C30-8999-92F81FD0307C}</a:tableStyleId>
               </a:tblPr>
               <a:tblGrid>
-                <a:gridCol w="1847958"/>
-                <a:gridCol w="2326368"/>
-                <a:gridCol w="2641112"/>
-                <a:gridCol w="4315551"/>
+                <a:gridCol w="1619053"/>
+                <a:gridCol w="2727596"/>
+                <a:gridCol w="3003353"/>
+                <a:gridCol w="3780988"/>
               </a:tblGrid>
               <a:tr h="335280">
                 <a:tc>
@@ -46970,7 +46970,7 @@
                           </a:solidFill>
                           <a:latin typeface="Calibri"/>
                         </a:rPr>
-                        <a:t>KR-00979</a:t>
+                        <a:t>...</a:t>
                       </a:r>
                     </a:p>
                   </a:txBody>
@@ -46992,7 +46992,7 @@
                           </a:solidFill>
                           <a:latin typeface="Calibri"/>
                         </a:rPr>
-                        <a:t>Rs 970</a:t>
+                        <a:t>eight more orders</a:t>
                       </a:r>
                     </a:p>
                   </a:txBody>
@@ -47014,7 +47014,7 @@
                           </a:solidFill>
                           <a:latin typeface="Calibri"/>
                         </a:rPr>
-                        <a:t>Rs 3,76,90,290</a:t>
+                        <a:t>Rs 3,76,90,290 each</a:t>
                       </a:r>
                     </a:p>
                   </a:txBody>
@@ -47036,7 +47036,7 @@
                           </a:solidFill>
                           <a:latin typeface="Calibri"/>
                         </a:rPr>
-                        <a:t>Rs 3,76,90,290</a:t>
+                        <a:t>one step each</a:t>
                       </a:r>
                     </a:p>
                   </a:txBody>
@@ -47047,6 +47047,96 @@
                   </a:tcPr>
                 </a:tc>
               </a:tr>
+              <a:tr h="335280">
+                <a:tc>
+                  <a:txBody>
+                    <a:bodyPr/>
+                    <a:lstStyle/>
+                    <a:p>
+                      <a:r>
+                        <a:rPr sz="1200" b="0" i="0">
+                          <a:solidFill>
+                            <a:srgbClr val="1A1440"/>
+                          </a:solidFill>
+                          <a:latin typeface="Calibri"/>
+                        </a:rPr>
+                        <a:t>KR-00979</a:t>
+                      </a:r>
+                    </a:p>
+                  </a:txBody>
+                  <a:tcPr marL="101600" marR="101600" marT="38100" marB="38100" anchor="ctr">
+                    <a:solidFill>
+                      <a:srgbClr val="FFFFFF"/>
+                    </a:solidFill>
+                  </a:tcPr>
+                </a:tc>
+                <a:tc>
+                  <a:txBody>
+                    <a:bodyPr/>
+                    <a:lstStyle/>
+                    <a:p>
+                      <a:r>
+                        <a:rPr sz="1200" b="0" i="0">
+                          <a:solidFill>
+                            <a:srgbClr val="1A1440"/>
+                          </a:solidFill>
+                          <a:latin typeface="Calibri"/>
+                        </a:rPr>
+                        <a:t>Rs 970</a:t>
+                      </a:r>
+                    </a:p>
+                  </a:txBody>
+                  <a:tcPr marL="101600" marR="101600" marT="38100" marB="38100" anchor="ctr">
+                    <a:solidFill>
+                      <a:srgbClr val="FFFFFF"/>
+                    </a:solidFill>
+                  </a:tcPr>
+                </a:tc>
+                <a:tc>
+                  <a:txBody>
+                    <a:bodyPr/>
+                    <a:lstStyle/>
+                    <a:p>
+                      <a:r>
+                        <a:rPr sz="1200" b="0" i="0">
+                          <a:solidFill>
+                            <a:srgbClr val="1A1440"/>
+                          </a:solidFill>
+                          <a:latin typeface="Calibri"/>
+                        </a:rPr>
+                        <a:t>Rs 3,76,90,290</a:t>
+                      </a:r>
+                    </a:p>
+                  </a:txBody>
+                  <a:tcPr marL="101600" marR="101600" marT="38100" marB="38100" anchor="ctr">
+                    <a:solidFill>
+                      <a:srgbClr val="FFFFFF"/>
+                    </a:solidFill>
+                  </a:tcPr>
+                </a:tc>
+                <a:tc>
+                  <a:txBody>
+                    <a:bodyPr/>
+                    <a:lstStyle/>
+                    <a:p>
+                      <a:r>
+                        <a:rPr sz="1200" b="0" i="0">
+                          <a:solidFill>
+                            <a:srgbClr val="1A1440"/>
+                          </a:solidFill>
+                          <a:latin typeface="Calibri"/>
+                        </a:rPr>
+                        <a:t>Rs 3,76,90,290</a:t>
+                      </a:r>
+                    </a:p>
+                  </a:txBody>
+                  <a:tcPr marL="101600" marR="101600" marT="38100" marB="38100" anchor="ctr">
+                    <a:solidFill>
+                      <a:srgbClr val="FFFFFF"/>
+                    </a:solidFill>
+                  </a:tcPr>
+                </a:tc>
+              </a:tr>
             </a:tbl>
           </a:graphicData>
         </a:graphic>
@@ -47059,7 +47149,7 @@
         </p:nvSpPr>
         <p:spPr>
           <a:xfrm>
-            <a:off x="530352" y="3889248"/>
+            <a:off x="530352" y="4224528"/>
             <a:ext cx="11130991" cy="962152"/>
           </a:xfrm>
           <a:prstGeom prst="roundRect">
@@ -47111,7 +47201,7 @@
         </p:nvSpPr>
         <p:spPr>
           <a:xfrm>
-            <a:off x="713232" y="4017263"/>
+            <a:off x="713232" y="4352544"/>
             <a:ext cx="91440" cy="91440"/>
           </a:xfrm>
           <a:prstGeom prst="ellipse">
@@ -47155,7 +47245,7 @@
         </p:nvSpPr>
         <p:spPr>
           <a:xfrm>
-            <a:off x="868680" y="4017263"/>
+            <a:off x="868680" y="4352544"/>
             <a:ext cx="91440" cy="91440"/>
           </a:xfrm>
           <a:prstGeom prst="ellipse">
@@ -47199,7 +47289,7 @@
         </p:nvSpPr>
         <p:spPr>
           <a:xfrm>
-            <a:off x="1024128" y="4017263"/>
+            <a:off x="1024128" y="4352544"/>
             <a:ext cx="91440" cy="91440"/>
           </a:xfrm>
           <a:prstGeom prst="ellipse">
@@ -47243,7 +47333,7 @@
         </p:nvSpPr>
         <p:spPr>
           <a:xfrm>
-            <a:off x="804671" y="4218432"/>
+            <a:off x="804671" y="4553712"/>
             <a:ext cx="10673791" cy="559816"/>
           </a:xfrm>
           <a:prstGeom prst="rect">
@@ -54752,7 +54842,7 @@
                 </a:solidFill>
                 <a:latin typeface="Calibri"/>
               </a:rPr>
-              <a:t>Week 2 Wednesday: the protect list</a:t>
+              <a:t>Week 2, Day 3. The protect list, ranked the way it was asked</a:t>
             </a:r>
           </a:p>
         </p:txBody>

--- a/content/W02/D3/slides/C2_W02_D03_half1_STUDENT.pptx
+++ b/content/W02/D3/slides/C2_W02_D03_half1_STUDENT.pptx
@@ -3581,7 +3581,17 @@
           </a:p>
           <a:p>
             <a:r>
-              <a:t>total. Adding order_id makes each row its own step, and the same step on every run. Say the sixth</a:t>
+              <a:t>total. Adding order_id makes each row its own step. If anyone writes the running total with a ROWS</a:t>
+            </a:r>
+          </a:p>
+          <a:p>
+            <a:r>
+              <a:t>frame, tied rows are added in an order the database picks and a row's figure can change between</a:t>
+            </a:r>
+          </a:p>
+          <a:p>
+            <a:r>
+              <a:t>runs; the same tiebreaker fixes it. Say the sixth</a:t>
             </a:r>
           </a:p>
           <a:p>
@@ -13157,7 +13167,7 @@
       </p:sp>
       <p:pic>
         <p:nvPicPr>
-          <p:cNvPr id="9" name="mermaid diagram" descr="818e5812c42e9826.png"/>
+          <p:cNvPr id="9" name="mermaid diagram" descr="4a507617d3782b84.png"/>
           <p:cNvPicPr>
             <a:picLocks noChangeAspect="1"/>
           </p:cNvPicPr>
@@ -13171,8 +13181,8 @@
         </p:blipFill>
         <p:spPr>
           <a:xfrm>
-            <a:off x="780897" y="1956816"/>
-            <a:ext cx="10629900" cy="1600200"/>
+            <a:off x="530352" y="1956816"/>
+            <a:ext cx="11130991" cy="1118763"/>
           </a:xfrm>
           <a:prstGeom prst="rect">
             <a:avLst/>
@@ -13187,7 +13197,7 @@
         </p:nvSpPr>
         <p:spPr>
           <a:xfrm>
-            <a:off x="530352" y="3703320"/>
+            <a:off x="530352" y="3221883"/>
             <a:ext cx="11130991" cy="1121664"/>
           </a:xfrm>
           <a:prstGeom prst="roundRect">
@@ -13241,7 +13251,7 @@
         </p:nvSpPr>
         <p:spPr>
           <a:xfrm>
-            <a:off x="758952" y="4035552"/>
+            <a:off x="758952" y="3554115"/>
             <a:ext cx="457200" cy="457200"/>
           </a:xfrm>
           <a:prstGeom prst="ellipse">
@@ -13293,7 +13303,7 @@
         </p:blipFill>
         <p:spPr>
           <a:xfrm>
-            <a:off x="868680" y="4145280"/>
+            <a:off x="868680" y="3663843"/>
             <a:ext cx="237744" cy="237744"/>
           </a:xfrm>
           <a:prstGeom prst="rect">
@@ -13309,7 +13319,7 @@
         </p:nvSpPr>
         <p:spPr>
           <a:xfrm>
-            <a:off x="1399031" y="3849624"/>
+            <a:off x="1399031" y="3368187"/>
             <a:ext cx="9987991" cy="160401"/>
           </a:xfrm>
           <a:prstGeom prst="rect">
@@ -13344,7 +13354,7 @@
         </p:nvSpPr>
         <p:spPr>
           <a:xfrm>
-            <a:off x="1399031" y="4069080"/>
+            <a:off x="1399031" y="3587643"/>
             <a:ext cx="9987991" cy="682752"/>
           </a:xfrm>
           <a:prstGeom prst="rect">
@@ -13964,7 +13974,7 @@
       </p:sp>
       <p:pic>
         <p:nvPicPr>
-          <p:cNvPr id="9" name="mermaid diagram" descr="7ef44a2d0006e263.png"/>
+          <p:cNvPr id="9" name="mermaid diagram" descr="dfb7f7dcd79bc1ba.png"/>
           <p:cNvPicPr>
             <a:picLocks noChangeAspect="1"/>
           </p:cNvPicPr>
@@ -13978,8 +13988,8 @@
         </p:blipFill>
         <p:spPr>
           <a:xfrm>
-            <a:off x="780897" y="1956816"/>
-            <a:ext cx="10629900" cy="2828925"/>
+            <a:off x="2588266" y="1956816"/>
+            <a:ext cx="7015162" cy="1514475"/>
           </a:xfrm>
           <a:prstGeom prst="rect">
             <a:avLst/>
@@ -13994,7 +14004,7 @@
         </p:nvSpPr>
         <p:spPr>
           <a:xfrm>
-            <a:off x="530352" y="4932045"/>
+            <a:off x="530352" y="3617595"/>
             <a:ext cx="11130991" cy="962152"/>
           </a:xfrm>
           <a:prstGeom prst="roundRect">
@@ -14046,7 +14056,7 @@
         </p:nvSpPr>
         <p:spPr>
           <a:xfrm>
-            <a:off x="713232" y="5060061"/>
+            <a:off x="713232" y="3745611"/>
             <a:ext cx="91440" cy="91440"/>
           </a:xfrm>
           <a:prstGeom prst="ellipse">
@@ -14090,7 +14100,7 @@
         </p:nvSpPr>
         <p:spPr>
           <a:xfrm>
-            <a:off x="868680" y="5060061"/>
+            <a:off x="868680" y="3745611"/>
             <a:ext cx="91440" cy="91440"/>
           </a:xfrm>
           <a:prstGeom prst="ellipse">
@@ -14134,7 +14144,7 @@
         </p:nvSpPr>
         <p:spPr>
           <a:xfrm>
-            <a:off x="1024128" y="5060061"/>
+            <a:off x="1024128" y="3745611"/>
             <a:ext cx="91440" cy="91440"/>
           </a:xfrm>
           <a:prstGeom prst="ellipse">
@@ -14178,7 +14188,7 @@
         </p:nvSpPr>
         <p:spPr>
           <a:xfrm>
-            <a:off x="804671" y="5261229"/>
+            <a:off x="804671" y="3946779"/>
             <a:ext cx="10673791" cy="559816"/>
           </a:xfrm>
           <a:prstGeom prst="rect">
@@ -15042,7 +15052,7 @@
       </p:sp>
       <p:pic>
         <p:nvPicPr>
-          <p:cNvPr id="14" name="mermaid diagram" descr="06c99e96ab73fe5d.png"/>
+          <p:cNvPr id="14" name="mermaid diagram" descr="65fd2146f95aaad4.png"/>
           <p:cNvPicPr>
             <a:picLocks noChangeAspect="1"/>
           </p:cNvPicPr>
@@ -15056,8 +15066,8 @@
         </p:blipFill>
         <p:spPr>
           <a:xfrm>
-            <a:off x="530352" y="2831084"/>
-            <a:ext cx="11130991" cy="1129748"/>
+            <a:off x="1638147" y="2831084"/>
+            <a:ext cx="8915400" cy="1128712"/>
           </a:xfrm>
           <a:prstGeom prst="rect">
             <a:avLst/>
@@ -22452,7 +22462,7 @@
       </p:sp>
       <p:pic>
         <p:nvPicPr>
-          <p:cNvPr id="9" name="mermaid diagram" descr="069742a8089cc0d4.png"/>
+          <p:cNvPr id="9" name="mermaid diagram" descr="65c39f22671186db.png"/>
           <p:cNvPicPr>
             <a:picLocks noChangeAspect="1"/>
           </p:cNvPicPr>
@@ -22466,8 +22476,8 @@
         </p:blipFill>
         <p:spPr>
           <a:xfrm>
-            <a:off x="2152497" y="1956816"/>
-            <a:ext cx="7886700" cy="2786062"/>
+            <a:off x="3088328" y="1956816"/>
+            <a:ext cx="6015037" cy="2014537"/>
           </a:xfrm>
           <a:prstGeom prst="rect">
             <a:avLst/>
@@ -27597,7 +27607,7 @@
       </p:sp>
       <p:pic>
         <p:nvPicPr>
-          <p:cNvPr id="9" name="mermaid diagram" descr="83b5168f5f4a30a2.png"/>
+          <p:cNvPr id="9" name="mermaid diagram" descr="09a61d9d9a71cf66.png"/>
           <p:cNvPicPr>
             <a:picLocks noChangeAspect="1"/>
           </p:cNvPicPr>
@@ -27611,8 +27621,8 @@
         </p:blipFill>
         <p:spPr>
           <a:xfrm>
-            <a:off x="3524097" y="1937671"/>
-            <a:ext cx="5143500" cy="2786062"/>
+            <a:off x="3081185" y="1956816"/>
+            <a:ext cx="6029325" cy="1800225"/>
           </a:xfrm>
           <a:prstGeom prst="rect">
             <a:avLst/>
@@ -27627,7 +27637,7 @@
         </p:nvSpPr>
         <p:spPr>
           <a:xfrm>
-            <a:off x="530352" y="4870037"/>
+            <a:off x="530352" y="3903345"/>
             <a:ext cx="11130991" cy="1074420"/>
           </a:xfrm>
           <a:prstGeom prst="roundRect">
@@ -27675,7 +27685,7 @@
         </p:nvSpPr>
         <p:spPr>
           <a:xfrm>
-            <a:off x="676656" y="4998053"/>
+            <a:off x="676656" y="4031360"/>
             <a:ext cx="45720" cy="818388"/>
           </a:xfrm>
           <a:prstGeom prst="roundRect">
@@ -27721,7 +27731,7 @@
         </p:nvSpPr>
         <p:spPr>
           <a:xfrm>
-            <a:off x="877824" y="4988909"/>
+            <a:off x="877824" y="4022217"/>
             <a:ext cx="10564063" cy="891540"/>
           </a:xfrm>
           <a:prstGeom prst="rect">
@@ -28350,7 +28360,7 @@
       </p:sp>
       <p:pic>
         <p:nvPicPr>
-          <p:cNvPr id="9" name="mermaid diagram" descr="f187dfcac7c5c453.png"/>
+          <p:cNvPr id="9" name="mermaid diagram" descr="04ddf3cde7972034.png"/>
           <p:cNvPicPr>
             <a:picLocks noChangeAspect="1"/>
           </p:cNvPicPr>
@@ -28364,8 +28374,8 @@
         </p:blipFill>
         <p:spPr>
           <a:xfrm>
-            <a:off x="780897" y="1956816"/>
-            <a:ext cx="10629900" cy="1100137"/>
+            <a:off x="2031053" y="1956816"/>
+            <a:ext cx="8129587" cy="871537"/>
           </a:xfrm>
           <a:prstGeom prst="rect">
             <a:avLst/>
@@ -28380,7 +28390,7 @@
         </p:nvSpPr>
         <p:spPr>
           <a:xfrm>
-            <a:off x="530352" y="3203257"/>
+            <a:off x="530352" y="2974657"/>
             <a:ext cx="11130991" cy="1380744"/>
           </a:xfrm>
           <a:prstGeom prst="roundRect">
@@ -28434,7 +28444,7 @@
         </p:nvSpPr>
         <p:spPr>
           <a:xfrm>
-            <a:off x="758952" y="3665029"/>
+            <a:off x="758952" y="3436429"/>
             <a:ext cx="457200" cy="457200"/>
           </a:xfrm>
           <a:prstGeom prst="ellipse">
@@ -28486,7 +28496,7 @@
         </p:blipFill>
         <p:spPr>
           <a:xfrm>
-            <a:off x="868680" y="3774757"/>
+            <a:off x="868680" y="3546157"/>
             <a:ext cx="237744" cy="237744"/>
           </a:xfrm>
           <a:prstGeom prst="rect">
@@ -28502,7 +28512,7 @@
         </p:nvSpPr>
         <p:spPr>
           <a:xfrm>
-            <a:off x="1399031" y="3349561"/>
+            <a:off x="1399031" y="3120961"/>
             <a:ext cx="9987991" cy="160401"/>
           </a:xfrm>
           <a:prstGeom prst="rect">
@@ -28537,7 +28547,7 @@
         </p:nvSpPr>
         <p:spPr>
           <a:xfrm>
-            <a:off x="1399031" y="3569017"/>
+            <a:off x="1399031" y="3340417"/>
             <a:ext cx="9987991" cy="941832"/>
           </a:xfrm>
           <a:prstGeom prst="rect">
@@ -35863,7 +35873,7 @@
       </p:sp>
       <p:pic>
         <p:nvPicPr>
-          <p:cNvPr id="9" name="mermaid diagram" descr="eb7fd92cbec98375.png"/>
+          <p:cNvPr id="9" name="mermaid diagram" descr="1519f272a037a520.png"/>
           <p:cNvPicPr>
             <a:picLocks noChangeAspect="1"/>
           </p:cNvPicPr>
@@ -35877,8 +35887,8 @@
         </p:blipFill>
         <p:spPr>
           <a:xfrm>
-            <a:off x="780897" y="1956816"/>
-            <a:ext cx="10629900" cy="1600200"/>
+            <a:off x="1423835" y="1956816"/>
+            <a:ext cx="9344025" cy="1128712"/>
           </a:xfrm>
           <a:prstGeom prst="rect">
             <a:avLst/>
@@ -35893,7 +35903,7 @@
         </p:nvSpPr>
         <p:spPr>
           <a:xfrm>
-            <a:off x="530352" y="3703320"/>
+            <a:off x="530352" y="3231832"/>
             <a:ext cx="11130991" cy="772160"/>
           </a:xfrm>
           <a:prstGeom prst="rect">
@@ -40026,7 +40036,7 @@
       </p:sp>
       <p:pic>
         <p:nvPicPr>
-          <p:cNvPr id="9" name="mermaid diagram" descr="a260f1bd8b0a8f14.png"/>
+          <p:cNvPr id="9" name="mermaid diagram" descr="efd071a1195badef.png"/>
           <p:cNvPicPr>
             <a:picLocks noChangeAspect="1"/>
           </p:cNvPicPr>
@@ -40040,8 +40050,8 @@
         </p:blipFill>
         <p:spPr>
           <a:xfrm>
-            <a:off x="780897" y="1956816"/>
-            <a:ext cx="10629900" cy="1600200"/>
+            <a:off x="2702566" y="1956816"/>
+            <a:ext cx="6786562" cy="1371600"/>
           </a:xfrm>
           <a:prstGeom prst="rect">
             <a:avLst/>
@@ -40056,7 +40066,7 @@
         </p:nvSpPr>
         <p:spPr>
           <a:xfrm>
-            <a:off x="530352" y="3703320"/>
+            <a:off x="530352" y="3474720"/>
             <a:ext cx="11130991" cy="1121664"/>
           </a:xfrm>
           <a:prstGeom prst="roundRect">
@@ -40110,7 +40120,7 @@
         </p:nvSpPr>
         <p:spPr>
           <a:xfrm>
-            <a:off x="758952" y="4035552"/>
+            <a:off x="758952" y="3806952"/>
             <a:ext cx="457200" cy="457200"/>
           </a:xfrm>
           <a:prstGeom prst="ellipse">
@@ -40162,7 +40172,7 @@
         </p:blipFill>
         <p:spPr>
           <a:xfrm>
-            <a:off x="868680" y="4145280"/>
+            <a:off x="868680" y="3916680"/>
             <a:ext cx="237744" cy="237744"/>
           </a:xfrm>
           <a:prstGeom prst="rect">
@@ -40178,7 +40188,7 @@
         </p:nvSpPr>
         <p:spPr>
           <a:xfrm>
-            <a:off x="1399031" y="3849624"/>
+            <a:off x="1399031" y="3621024"/>
             <a:ext cx="9987991" cy="160401"/>
           </a:xfrm>
           <a:prstGeom prst="rect">
@@ -40213,7 +40223,7 @@
         </p:nvSpPr>
         <p:spPr>
           <a:xfrm>
-            <a:off x="1399031" y="4069080"/>
+            <a:off x="1399031" y="3840480"/>
             <a:ext cx="9987991" cy="682752"/>
           </a:xfrm>
           <a:prstGeom prst="rect">
@@ -40833,7 +40843,7 @@
       </p:sp>
       <p:pic>
         <p:nvPicPr>
-          <p:cNvPr id="9" name="mermaid diagram" descr="be6527f2103f3f17.png"/>
+          <p:cNvPr id="9" name="mermaid diagram" descr="ccd9dc72bf2e93c1.png"/>
           <p:cNvPicPr>
             <a:picLocks noChangeAspect="1"/>
           </p:cNvPicPr>
@@ -40847,8 +40857,8 @@
         </p:blipFill>
         <p:spPr>
           <a:xfrm>
-            <a:off x="530352" y="1956816"/>
-            <a:ext cx="11130991" cy="1353961"/>
+            <a:off x="2602553" y="1956816"/>
+            <a:ext cx="6986587" cy="1128712"/>
           </a:xfrm>
           <a:prstGeom prst="rect">
             <a:avLst/>
@@ -40863,7 +40873,7 @@
         </p:nvSpPr>
         <p:spPr>
           <a:xfrm>
-            <a:off x="530352" y="3457081"/>
+            <a:off x="530352" y="3231832"/>
             <a:ext cx="11130991" cy="1121664"/>
           </a:xfrm>
           <a:prstGeom prst="roundRect">
@@ -40917,7 +40927,7 @@
         </p:nvSpPr>
         <p:spPr>
           <a:xfrm>
-            <a:off x="758952" y="3789313"/>
+            <a:off x="758952" y="3564064"/>
             <a:ext cx="457200" cy="457200"/>
           </a:xfrm>
           <a:prstGeom prst="ellipse">
@@ -40969,7 +40979,7 @@
         </p:blipFill>
         <p:spPr>
           <a:xfrm>
-            <a:off x="868680" y="3899041"/>
+            <a:off x="868680" y="3673792"/>
             <a:ext cx="237744" cy="237744"/>
           </a:xfrm>
           <a:prstGeom prst="rect">
@@ -40985,7 +40995,7 @@
         </p:nvSpPr>
         <p:spPr>
           <a:xfrm>
-            <a:off x="1399031" y="3603385"/>
+            <a:off x="1399031" y="3378136"/>
             <a:ext cx="9987991" cy="160401"/>
           </a:xfrm>
           <a:prstGeom prst="rect">
@@ -41020,7 +41030,7 @@
         </p:nvSpPr>
         <p:spPr>
           <a:xfrm>
-            <a:off x="1399031" y="3822841"/>
+            <a:off x="1399031" y="3597592"/>
             <a:ext cx="9987991" cy="682752"/>
           </a:xfrm>
           <a:prstGeom prst="rect">
@@ -44384,7 +44394,7 @@
       </p:sp>
       <p:pic>
         <p:nvPicPr>
-          <p:cNvPr id="10" name="mermaid diagram" descr="85555365be3c0ceb.png"/>
+          <p:cNvPr id="10" name="mermaid diagram" descr="0f2dd2aeb89fba87.png"/>
           <p:cNvPicPr>
             <a:picLocks noChangeAspect="1"/>
           </p:cNvPicPr>
@@ -44398,8 +44408,8 @@
         </p:blipFill>
         <p:spPr>
           <a:xfrm>
-            <a:off x="780897" y="1956816"/>
-            <a:ext cx="10629900" cy="2543175"/>
+            <a:off x="2638272" y="1956816"/>
+            <a:ext cx="6915150" cy="1800225"/>
           </a:xfrm>
           <a:prstGeom prst="rect">
             <a:avLst/>
@@ -44414,7 +44424,7 @@
         </p:nvSpPr>
         <p:spPr>
           <a:xfrm>
-            <a:off x="530352" y="4646295"/>
+            <a:off x="530352" y="3903345"/>
             <a:ext cx="11130991" cy="1121664"/>
           </a:xfrm>
           <a:prstGeom prst="roundRect">
@@ -44468,7 +44478,7 @@
         </p:nvSpPr>
         <p:spPr>
           <a:xfrm>
-            <a:off x="758952" y="4978527"/>
+            <a:off x="758952" y="4235577"/>
             <a:ext cx="457200" cy="457200"/>
           </a:xfrm>
           <a:prstGeom prst="ellipse">
@@ -44520,7 +44530,7 @@
         </p:blipFill>
         <p:spPr>
           <a:xfrm>
-            <a:off x="868680" y="5088255"/>
+            <a:off x="868680" y="4345305"/>
             <a:ext cx="237744" cy="237744"/>
           </a:xfrm>
           <a:prstGeom prst="rect">
@@ -44536,7 +44546,7 @@
         </p:nvSpPr>
         <p:spPr>
           <a:xfrm>
-            <a:off x="1399031" y="4792599"/>
+            <a:off x="1399031" y="4049649"/>
             <a:ext cx="9987991" cy="160401"/>
           </a:xfrm>
           <a:prstGeom prst="rect">
@@ -44571,7 +44581,7 @@
         </p:nvSpPr>
         <p:spPr>
           <a:xfrm>
-            <a:off x="1399031" y="5012055"/>
+            <a:off x="1399031" y="4269105"/>
             <a:ext cx="9987991" cy="682752"/>
           </a:xfrm>
           <a:prstGeom prst="rect">
@@ -52095,7 +52105,7 @@
       </p:sp>
       <p:pic>
         <p:nvPicPr>
-          <p:cNvPr id="9" name="mermaid diagram" descr="2148a1327f2349c8.png"/>
+          <p:cNvPr id="9" name="mermaid diagram" descr="43249a5ad3541adb.png"/>
           <p:cNvPicPr>
             <a:picLocks noChangeAspect="1"/>
           </p:cNvPicPr>
@@ -52109,8 +52119,8 @@
         </p:blipFill>
         <p:spPr>
           <a:xfrm>
-            <a:off x="1544397" y="1664208"/>
-            <a:ext cx="9102900" cy="3462528"/>
+            <a:off x="530352" y="1956816"/>
+            <a:ext cx="11130991" cy="2530416"/>
           </a:xfrm>
           <a:prstGeom prst="rect">
             <a:avLst/>
@@ -52125,7 +52135,7 @@
         </p:nvSpPr>
         <p:spPr>
           <a:xfrm>
-            <a:off x="530352" y="5172456"/>
+            <a:off x="530352" y="4633536"/>
             <a:ext cx="11130991" cy="862584"/>
           </a:xfrm>
           <a:prstGeom prst="roundRect">
@@ -52179,7 +52189,7 @@
         </p:nvSpPr>
         <p:spPr>
           <a:xfrm>
-            <a:off x="758952" y="5375148"/>
+            <a:off x="758952" y="4836228"/>
             <a:ext cx="457200" cy="457200"/>
           </a:xfrm>
           <a:prstGeom prst="ellipse">
@@ -52231,7 +52241,7 @@
         </p:blipFill>
         <p:spPr>
           <a:xfrm>
-            <a:off x="868680" y="5484876"/>
+            <a:off x="868680" y="4945956"/>
             <a:ext cx="237744" cy="237744"/>
           </a:xfrm>
           <a:prstGeom prst="rect">
@@ -52247,7 +52257,7 @@
         </p:nvSpPr>
         <p:spPr>
           <a:xfrm>
-            <a:off x="1399031" y="5318760"/>
+            <a:off x="1399031" y="4779840"/>
             <a:ext cx="9987991" cy="160401"/>
           </a:xfrm>
           <a:prstGeom prst="rect">
@@ -52282,7 +52292,7 @@
         </p:nvSpPr>
         <p:spPr>
           <a:xfrm>
-            <a:off x="1399031" y="5538216"/>
+            <a:off x="1399031" y="4999296"/>
             <a:ext cx="9987991" cy="423672"/>
           </a:xfrm>
           <a:prstGeom prst="rect">
@@ -56404,7 +56414,7 @@
       </p:sp>
       <p:pic>
         <p:nvPicPr>
-          <p:cNvPr id="9" name="mermaid diagram" descr="a2e9a95e8ae96427.png"/>
+          <p:cNvPr id="9" name="mermaid diagram" descr="baf6bf1b461432b2.png"/>
           <p:cNvPicPr>
             <a:picLocks noChangeAspect="1"/>
           </p:cNvPicPr>
@@ -56418,8 +56428,8 @@
         </p:blipFill>
         <p:spPr>
           <a:xfrm>
-            <a:off x="780897" y="1956816"/>
-            <a:ext cx="10629900" cy="1600200"/>
+            <a:off x="909485" y="1956816"/>
+            <a:ext cx="10372725" cy="1128712"/>
           </a:xfrm>
           <a:prstGeom prst="rect">
             <a:avLst/>
@@ -56434,7 +56444,7 @@
         </p:nvSpPr>
         <p:spPr>
           <a:xfrm>
-            <a:off x="530352" y="3703320"/>
+            <a:off x="530352" y="3231832"/>
             <a:ext cx="11130991" cy="772160"/>
           </a:xfrm>
           <a:prstGeom prst="rect">
